--- a/ipsa/slides/java.pptx
+++ b/ipsa/slides/java.pptx
@@ -141,304 +141,26 @@
 <file path=ppt/changesInfos/changesInfo1.xml><?xml version="1.0" encoding="utf-8"?>
 <pc:chgInfo xmlns:a="http://schemas.openxmlformats.org/drawingml/2006/main" xmlns:r="http://schemas.openxmlformats.org/officeDocument/2006/relationships" xmlns:ac="http://schemas.microsoft.com/office/drawing/2013/main/command" xmlns:pc="http://schemas.microsoft.com/office/powerpoint/2013/main/command">
   <pc:docChgLst>
-    <pc:chgData name="Gerth Stølting Brodal" userId="04ef4784-6591-4f86-a140-f5c3b108582a" providerId="ADAL" clId="{062599EF-C02E-413A-A5B3-1F0C51E292A5}"/>
-    <pc:docChg chg="undo redo custSel modSld">
-      <pc:chgData name="Gerth Stølting Brodal" userId="04ef4784-6591-4f86-a140-f5c3b108582a" providerId="ADAL" clId="{062599EF-C02E-413A-A5B3-1F0C51E292A5}" dt="2023-05-08T06:36:10.897" v="510" actId="1076"/>
-      <pc:docMkLst>
-        <pc:docMk/>
-      </pc:docMkLst>
-      <pc:sldChg chg="addSp delSp modSp mod">
-        <pc:chgData name="Gerth Stølting Brodal" userId="04ef4784-6591-4f86-a140-f5c3b108582a" providerId="ADAL" clId="{062599EF-C02E-413A-A5B3-1F0C51E292A5}" dt="2023-05-08T05:52:17.745" v="340" actId="1036"/>
-        <pc:sldMkLst>
-          <pc:docMk/>
-          <pc:sldMk cId="324096631" sldId="702"/>
-        </pc:sldMkLst>
-      </pc:sldChg>
-      <pc:sldChg chg="modSp mod">
-        <pc:chgData name="Gerth Stølting Brodal" userId="04ef4784-6591-4f86-a140-f5c3b108582a" providerId="ADAL" clId="{062599EF-C02E-413A-A5B3-1F0C51E292A5}" dt="2023-05-08T06:00:01.553" v="415" actId="20577"/>
-        <pc:sldMkLst>
-          <pc:docMk/>
-          <pc:sldMk cId="1863959164" sldId="704"/>
-        </pc:sldMkLst>
-      </pc:sldChg>
-      <pc:sldChg chg="modNotesTx">
-        <pc:chgData name="Gerth Stølting Brodal" userId="04ef4784-6591-4f86-a140-f5c3b108582a" providerId="ADAL" clId="{062599EF-C02E-413A-A5B3-1F0C51E292A5}" dt="2023-05-06T11:07:24.817" v="134" actId="20577"/>
-        <pc:sldMkLst>
-          <pc:docMk/>
-          <pc:sldMk cId="873390135" sldId="705"/>
-        </pc:sldMkLst>
-      </pc:sldChg>
-      <pc:sldChg chg="modSp mod">
-        <pc:chgData name="Gerth Stølting Brodal" userId="04ef4784-6591-4f86-a140-f5c3b108582a" providerId="ADAL" clId="{062599EF-C02E-413A-A5B3-1F0C51E292A5}" dt="2023-05-06T11:15:01.635" v="239" actId="6549"/>
-        <pc:sldMkLst>
-          <pc:docMk/>
-          <pc:sldMk cId="285957609" sldId="712"/>
-        </pc:sldMkLst>
-      </pc:sldChg>
-      <pc:sldChg chg="modNotesTx">
-        <pc:chgData name="Gerth Stølting Brodal" userId="04ef4784-6591-4f86-a140-f5c3b108582a" providerId="ADAL" clId="{062599EF-C02E-413A-A5B3-1F0C51E292A5}" dt="2023-05-06T11:28:58.619" v="316" actId="20577"/>
-        <pc:sldMkLst>
-          <pc:docMk/>
-          <pc:sldMk cId="3651206223" sldId="714"/>
-        </pc:sldMkLst>
-      </pc:sldChg>
-      <pc:sldChg chg="modSp mod modNotesTx">
-        <pc:chgData name="Gerth Stølting Brodal" userId="04ef4784-6591-4f86-a140-f5c3b108582a" providerId="ADAL" clId="{062599EF-C02E-413A-A5B3-1F0C51E292A5}" dt="2023-05-08T06:09:47.682" v="418" actId="14100"/>
-        <pc:sldMkLst>
-          <pc:docMk/>
-          <pc:sldMk cId="2312210166" sldId="718"/>
-        </pc:sldMkLst>
-      </pc:sldChg>
-      <pc:sldChg chg="modNotesTx">
-        <pc:chgData name="Gerth Stølting Brodal" userId="04ef4784-6591-4f86-a140-f5c3b108582a" providerId="ADAL" clId="{062599EF-C02E-413A-A5B3-1F0C51E292A5}" dt="2023-05-08T05:55:36.934" v="411" actId="20577"/>
-        <pc:sldMkLst>
-          <pc:docMk/>
-          <pc:sldMk cId="3957855327" sldId="721"/>
-        </pc:sldMkLst>
-      </pc:sldChg>
-      <pc:sldChg chg="modSp mod modNotesTx">
-        <pc:chgData name="Gerth Stølting Brodal" userId="04ef4784-6591-4f86-a140-f5c3b108582a" providerId="ADAL" clId="{062599EF-C02E-413A-A5B3-1F0C51E292A5}" dt="2023-05-08T06:34:16.875" v="505" actId="20577"/>
-        <pc:sldMkLst>
-          <pc:docMk/>
-          <pc:sldMk cId="3676626356" sldId="722"/>
-        </pc:sldMkLst>
-      </pc:sldChg>
-      <pc:sldChg chg="modSp mod modNotesTx">
-        <pc:chgData name="Gerth Stølting Brodal" userId="04ef4784-6591-4f86-a140-f5c3b108582a" providerId="ADAL" clId="{062599EF-C02E-413A-A5B3-1F0C51E292A5}" dt="2023-05-08T06:36:10.897" v="510" actId="1076"/>
-        <pc:sldMkLst>
-          <pc:docMk/>
-          <pc:sldMk cId="2975332178" sldId="724"/>
-        </pc:sldMkLst>
-      </pc:sldChg>
-    </pc:docChg>
-  </pc:docChgLst>
-  <pc:docChgLst>
-    <pc:chgData name="Gerth Stølting Brodal" userId="04ef4784-6591-4f86-a140-f5c3b108582a" providerId="ADAL" clId="{1833E81B-E5FD-4821-A578-BF7F0E32FE7F}"/>
-    <pc:docChg chg="undo custSel modSld">
-      <pc:chgData name="Gerth Stølting Brodal" userId="04ef4784-6591-4f86-a140-f5c3b108582a" providerId="ADAL" clId="{1833E81B-E5FD-4821-A578-BF7F0E32FE7F}" dt="2022-05-08T23:55:25.814" v="554" actId="113"/>
-      <pc:docMkLst>
-        <pc:docMk/>
-      </pc:docMkLst>
-      <pc:sldChg chg="addSp delSp modSp mod">
-        <pc:chgData name="Gerth Stølting Brodal" userId="04ef4784-6591-4f86-a140-f5c3b108582a" providerId="ADAL" clId="{1833E81B-E5FD-4821-A578-BF7F0E32FE7F}" dt="2022-05-07T19:54:50.768" v="49" actId="6549"/>
-        <pc:sldMkLst>
-          <pc:docMk/>
-          <pc:sldMk cId="2436753486" sldId="517"/>
-        </pc:sldMkLst>
-      </pc:sldChg>
-      <pc:sldChg chg="addSp delSp modSp mod">
-        <pc:chgData name="Gerth Stølting Brodal" userId="04ef4784-6591-4f86-a140-f5c3b108582a" providerId="ADAL" clId="{1833E81B-E5FD-4821-A578-BF7F0E32FE7F}" dt="2022-05-08T21:08:02.478" v="316" actId="1036"/>
-        <pc:sldMkLst>
-          <pc:docMk/>
-          <pc:sldMk cId="324096631" sldId="702"/>
-        </pc:sldMkLst>
-      </pc:sldChg>
-      <pc:sldChg chg="modSp mod">
-        <pc:chgData name="Gerth Stølting Brodal" userId="04ef4784-6591-4f86-a140-f5c3b108582a" providerId="ADAL" clId="{1833E81B-E5FD-4821-A578-BF7F0E32FE7F}" dt="2022-05-07T20:03:15.018" v="64" actId="20577"/>
-        <pc:sldMkLst>
-          <pc:docMk/>
-          <pc:sldMk cId="1863959164" sldId="704"/>
-        </pc:sldMkLst>
-      </pc:sldChg>
-      <pc:sldChg chg="modSp mod">
-        <pc:chgData name="Gerth Stølting Brodal" userId="04ef4784-6591-4f86-a140-f5c3b108582a" providerId="ADAL" clId="{1833E81B-E5FD-4821-A578-BF7F0E32FE7F}" dt="2022-05-08T07:25:46.074" v="184" actId="2711"/>
-        <pc:sldMkLst>
-          <pc:docMk/>
-          <pc:sldMk cId="873390135" sldId="705"/>
-        </pc:sldMkLst>
-      </pc:sldChg>
-      <pc:sldChg chg="addSp delSp modSp mod">
-        <pc:chgData name="Gerth Stølting Brodal" userId="04ef4784-6591-4f86-a140-f5c3b108582a" providerId="ADAL" clId="{1833E81B-E5FD-4821-A578-BF7F0E32FE7F}" dt="2022-05-08T21:41:51.306" v="324" actId="207"/>
-        <pc:sldMkLst>
-          <pc:docMk/>
-          <pc:sldMk cId="1537406623" sldId="707"/>
-        </pc:sldMkLst>
-      </pc:sldChg>
-      <pc:sldChg chg="modSp mod">
-        <pc:chgData name="Gerth Stølting Brodal" userId="04ef4784-6591-4f86-a140-f5c3b108582a" providerId="ADAL" clId="{1833E81B-E5FD-4821-A578-BF7F0E32FE7F}" dt="2022-05-08T21:51:08.106" v="326" actId="1076"/>
-        <pc:sldMkLst>
-          <pc:docMk/>
-          <pc:sldMk cId="467931418" sldId="708"/>
-        </pc:sldMkLst>
-      </pc:sldChg>
-      <pc:sldChg chg="modNotesTx">
-        <pc:chgData name="Gerth Stølting Brodal" userId="04ef4784-6591-4f86-a140-f5c3b108582a" providerId="ADAL" clId="{1833E81B-E5FD-4821-A578-BF7F0E32FE7F}" dt="2022-05-08T16:25:53.124" v="292" actId="313"/>
-        <pc:sldMkLst>
-          <pc:docMk/>
-          <pc:sldMk cId="1389040031" sldId="709"/>
-        </pc:sldMkLst>
-      </pc:sldChg>
-      <pc:sldChg chg="addSp delSp modSp mod">
-        <pc:chgData name="Gerth Stølting Brodal" userId="04ef4784-6591-4f86-a140-f5c3b108582a" providerId="ADAL" clId="{1833E81B-E5FD-4821-A578-BF7F0E32FE7F}" dt="2022-05-08T13:39:07.328" v="195" actId="208"/>
-        <pc:sldMkLst>
-          <pc:docMk/>
-          <pc:sldMk cId="2636328320" sldId="715"/>
-        </pc:sldMkLst>
-      </pc:sldChg>
-      <pc:sldChg chg="modSp mod">
-        <pc:chgData name="Gerth Stølting Brodal" userId="04ef4784-6591-4f86-a140-f5c3b108582a" providerId="ADAL" clId="{1833E81B-E5FD-4821-A578-BF7F0E32FE7F}" dt="2022-05-08T22:17:54.121" v="334" actId="20577"/>
-        <pc:sldMkLst>
-          <pc:docMk/>
-          <pc:sldMk cId="2312210166" sldId="718"/>
-        </pc:sldMkLst>
-      </pc:sldChg>
-      <pc:sldChg chg="modNotesTx">
-        <pc:chgData name="Gerth Stølting Brodal" userId="04ef4784-6591-4f86-a140-f5c3b108582a" providerId="ADAL" clId="{1833E81B-E5FD-4821-A578-BF7F0E32FE7F}" dt="2022-05-08T22:55:56.369" v="338" actId="20577"/>
-        <pc:sldMkLst>
-          <pc:docMk/>
-          <pc:sldMk cId="3034035244" sldId="719"/>
-        </pc:sldMkLst>
-      </pc:sldChg>
-      <pc:sldChg chg="modNotesTx">
-        <pc:chgData name="Gerth Stølting Brodal" userId="04ef4784-6591-4f86-a140-f5c3b108582a" providerId="ADAL" clId="{1833E81B-E5FD-4821-A578-BF7F0E32FE7F}" dt="2022-05-08T23:44:23.451" v="439" actId="20577"/>
-        <pc:sldMkLst>
-          <pc:docMk/>
-          <pc:sldMk cId="3676626356" sldId="722"/>
-        </pc:sldMkLst>
-      </pc:sldChg>
-      <pc:sldChg chg="modNotesTx">
-        <pc:chgData name="Gerth Stølting Brodal" userId="04ef4784-6591-4f86-a140-f5c3b108582a" providerId="ADAL" clId="{1833E81B-E5FD-4821-A578-BF7F0E32FE7F}" dt="2022-05-08T23:55:25.814" v="554" actId="113"/>
-        <pc:sldMkLst>
-          <pc:docMk/>
-          <pc:sldMk cId="2975332178" sldId="724"/>
-        </pc:sldMkLst>
-      </pc:sldChg>
-    </pc:docChg>
-  </pc:docChgLst>
-  <pc:docChgLst>
-    <pc:chgData name="Gerth Stølting Brodal" userId="04ef4784-6591-4f86-a140-f5c3b108582a" providerId="ADAL" clId="{F3CBFA10-E9F6-4185-94C7-11F914C6330E}"/>
-    <pc:docChg chg="undo custSel modSld">
-      <pc:chgData name="Gerth Stølting Brodal" userId="04ef4784-6591-4f86-a140-f5c3b108582a" providerId="ADAL" clId="{F3CBFA10-E9F6-4185-94C7-11F914C6330E}" dt="2025-04-26T18:30:28.470" v="107" actId="20577"/>
-      <pc:docMkLst>
-        <pc:docMk/>
-      </pc:docMkLst>
-      <pc:sldChg chg="addSp delSp modSp mod">
-        <pc:chgData name="Gerth Stølting Brodal" userId="04ef4784-6591-4f86-a140-f5c3b108582a" providerId="ADAL" clId="{F3CBFA10-E9F6-4185-94C7-11F914C6330E}" dt="2025-04-26T18:18:52.042" v="28" actId="1035"/>
-        <pc:sldMkLst>
-          <pc:docMk/>
-          <pc:sldMk cId="324096631" sldId="702"/>
-        </pc:sldMkLst>
-        <pc:spChg chg="mod">
-          <ac:chgData name="Gerth Stølting Brodal" userId="04ef4784-6591-4f86-a140-f5c3b108582a" providerId="ADAL" clId="{F3CBFA10-E9F6-4185-94C7-11F914C6330E}" dt="2025-04-26T18:18:52.042" v="28" actId="1035"/>
-          <ac:spMkLst>
-            <pc:docMk/>
-            <pc:sldMk cId="324096631" sldId="702"/>
-            <ac:spMk id="3" creationId="{00000000-0000-0000-0000-000000000000}"/>
-          </ac:spMkLst>
-        </pc:spChg>
-        <pc:picChg chg="del">
-          <ac:chgData name="Gerth Stølting Brodal" userId="04ef4784-6591-4f86-a140-f5c3b108582a" providerId="ADAL" clId="{F3CBFA10-E9F6-4185-94C7-11F914C6330E}" dt="2025-04-26T18:16:25.192" v="3" actId="478"/>
-          <ac:picMkLst>
-            <pc:docMk/>
-            <pc:sldMk cId="324096631" sldId="702"/>
-            <ac:picMk id="5" creationId="{2C662EB3-BAA2-5FB4-92A7-CE08B31D6375}"/>
-          </ac:picMkLst>
-        </pc:picChg>
-        <pc:picChg chg="add mod ord">
-          <ac:chgData name="Gerth Stølting Brodal" userId="04ef4784-6591-4f86-a140-f5c3b108582a" providerId="ADAL" clId="{F3CBFA10-E9F6-4185-94C7-11F914C6330E}" dt="2025-04-26T18:16:39.671" v="6" actId="1076"/>
-          <ac:picMkLst>
-            <pc:docMk/>
-            <pc:sldMk cId="324096631" sldId="702"/>
-            <ac:picMk id="6" creationId="{D3D0EFE0-7133-ABEE-37BF-EC398D5E0532}"/>
-          </ac:picMkLst>
-        </pc:picChg>
-        <pc:picChg chg="mod">
-          <ac:chgData name="Gerth Stølting Brodal" userId="04ef4784-6591-4f86-a140-f5c3b108582a" providerId="ADAL" clId="{F3CBFA10-E9F6-4185-94C7-11F914C6330E}" dt="2025-04-26T18:16:45.579" v="14" actId="1035"/>
-          <ac:picMkLst>
-            <pc:docMk/>
-            <pc:sldMk cId="324096631" sldId="702"/>
-            <ac:picMk id="7" creationId="{9908D829-A712-4BAE-8893-B0DBE967C335}"/>
-          </ac:picMkLst>
-        </pc:picChg>
-      </pc:sldChg>
-      <pc:sldChg chg="modSp mod">
-        <pc:chgData name="Gerth Stølting Brodal" userId="04ef4784-6591-4f86-a140-f5c3b108582a" providerId="ADAL" clId="{F3CBFA10-E9F6-4185-94C7-11F914C6330E}" dt="2025-04-26T18:18:19.120" v="18" actId="20577"/>
-        <pc:sldMkLst>
-          <pc:docMk/>
-          <pc:sldMk cId="1863959164" sldId="704"/>
-        </pc:sldMkLst>
-        <pc:spChg chg="mod">
-          <ac:chgData name="Gerth Stølting Brodal" userId="04ef4784-6591-4f86-a140-f5c3b108582a" providerId="ADAL" clId="{F3CBFA10-E9F6-4185-94C7-11F914C6330E}" dt="2025-04-26T18:18:19.120" v="18" actId="20577"/>
-          <ac:spMkLst>
-            <pc:docMk/>
-            <pc:sldMk cId="1863959164" sldId="704"/>
-            <ac:spMk id="3" creationId="{00000000-0000-0000-0000-000000000000}"/>
-          </ac:spMkLst>
-        </pc:spChg>
-      </pc:sldChg>
-      <pc:sldChg chg="modNotesTx">
-        <pc:chgData name="Gerth Stølting Brodal" userId="04ef4784-6591-4f86-a140-f5c3b108582a" providerId="ADAL" clId="{F3CBFA10-E9F6-4185-94C7-11F914C6330E}" dt="2025-04-26T18:30:28.470" v="107" actId="20577"/>
-        <pc:sldMkLst>
-          <pc:docMk/>
-          <pc:sldMk cId="3691851833" sldId="711"/>
-        </pc:sldMkLst>
-      </pc:sldChg>
-      <pc:sldChg chg="modSp mod">
-        <pc:chgData name="Gerth Stølting Brodal" userId="04ef4784-6591-4f86-a140-f5c3b108582a" providerId="ADAL" clId="{F3CBFA10-E9F6-4185-94C7-11F914C6330E}" dt="2025-04-26T18:27:37.593" v="34" actId="14100"/>
-        <pc:sldMkLst>
-          <pc:docMk/>
-          <pc:sldMk cId="2312210166" sldId="718"/>
-        </pc:sldMkLst>
-        <pc:spChg chg="mod">
-          <ac:chgData name="Gerth Stølting Brodal" userId="04ef4784-6591-4f86-a140-f5c3b108582a" providerId="ADAL" clId="{F3CBFA10-E9F6-4185-94C7-11F914C6330E}" dt="2025-04-26T18:27:28.375" v="33" actId="14100"/>
-          <ac:spMkLst>
-            <pc:docMk/>
-            <pc:sldMk cId="2312210166" sldId="718"/>
-            <ac:spMk id="52" creationId="{00000000-0000-0000-0000-000000000000}"/>
-          </ac:spMkLst>
-        </pc:spChg>
-        <pc:spChg chg="mod">
-          <ac:chgData name="Gerth Stølting Brodal" userId="04ef4784-6591-4f86-a140-f5c3b108582a" providerId="ADAL" clId="{F3CBFA10-E9F6-4185-94C7-11F914C6330E}" dt="2025-04-26T18:27:37.593" v="34" actId="14100"/>
-          <ac:spMkLst>
-            <pc:docMk/>
-            <pc:sldMk cId="2312210166" sldId="718"/>
-            <ac:spMk id="53" creationId="{00000000-0000-0000-0000-000000000000}"/>
-          </ac:spMkLst>
-        </pc:spChg>
-      </pc:sldChg>
-    </pc:docChg>
-  </pc:docChgLst>
-  <pc:docChgLst>
-    <pc:chgData name="Gerth Stølting Brodal" userId="04ef4784-6591-4f86-a140-f5c3b108582a" providerId="ADAL" clId="{E844BD47-6F0E-48E1-86F1-22B2BA2793E1}"/>
-    <pc:docChg chg="undo custSel modSld">
-      <pc:chgData name="Gerth Stølting Brodal" userId="04ef4784-6591-4f86-a140-f5c3b108582a" providerId="ADAL" clId="{E844BD47-6F0E-48E1-86F1-22B2BA2793E1}" dt="2024-05-06T11:44:39.974" v="100" actId="20577"/>
+    <pc:chgData name="Gerth Stølting Brodal" userId="04ef4784-6591-4f86-a140-f5c3b108582a" providerId="ADAL" clId="{73BAC7D6-516A-44B5-B4B0-C7B08CA8B392}"/>
+    <pc:docChg chg="modSld">
+      <pc:chgData name="Gerth Stølting Brodal" userId="04ef4784-6591-4f86-a140-f5c3b108582a" providerId="ADAL" clId="{73BAC7D6-516A-44B5-B4B0-C7B08CA8B392}" dt="2026-03-18T13:06:23.324" v="3" actId="20577"/>
       <pc:docMkLst>
         <pc:docMk/>
       </pc:docMkLst>
       <pc:sldChg chg="modSp mod">
-        <pc:chgData name="Gerth Stølting Brodal" userId="04ef4784-6591-4f86-a140-f5c3b108582a" providerId="ADAL" clId="{E844BD47-6F0E-48E1-86F1-22B2BA2793E1}" dt="2024-05-06T07:02:16.935" v="99" actId="1076"/>
+        <pc:chgData name="Gerth Stølting Brodal" userId="04ef4784-6591-4f86-a140-f5c3b108582a" providerId="ADAL" clId="{73BAC7D6-516A-44B5-B4B0-C7B08CA8B392}" dt="2026-03-18T13:06:23.324" v="3" actId="20577"/>
         <pc:sldMkLst>
           <pc:docMk/>
-          <pc:sldMk cId="3043987364" sldId="701"/>
+          <pc:sldMk cId="1667845984" sldId="703"/>
         </pc:sldMkLst>
-      </pc:sldChg>
-      <pc:sldChg chg="addSp delSp modSp mod">
-        <pc:chgData name="Gerth Stølting Brodal" userId="04ef4784-6591-4f86-a140-f5c3b108582a" providerId="ADAL" clId="{E844BD47-6F0E-48E1-86F1-22B2BA2793E1}" dt="2024-05-06T06:28:32.588" v="25" actId="1035"/>
-        <pc:sldMkLst>
-          <pc:docMk/>
-          <pc:sldMk cId="324096631" sldId="702"/>
-        </pc:sldMkLst>
-      </pc:sldChg>
-      <pc:sldChg chg="modSp mod modNotesTx">
-        <pc:chgData name="Gerth Stølting Brodal" userId="04ef4784-6591-4f86-a140-f5c3b108582a" providerId="ADAL" clId="{E844BD47-6F0E-48E1-86F1-22B2BA2793E1}" dt="2024-05-06T06:42:06.319" v="95" actId="20577"/>
-        <pc:sldMkLst>
-          <pc:docMk/>
-          <pc:sldMk cId="1863959164" sldId="704"/>
-        </pc:sldMkLst>
-      </pc:sldChg>
-      <pc:sldChg chg="modSp mod">
-        <pc:chgData name="Gerth Stølting Brodal" userId="04ef4784-6591-4f86-a140-f5c3b108582a" providerId="ADAL" clId="{E844BD47-6F0E-48E1-86F1-22B2BA2793E1}" dt="2024-05-06T06:44:50.750" v="98" actId="207"/>
-        <pc:sldMkLst>
-          <pc:docMk/>
-          <pc:sldMk cId="1389040031" sldId="709"/>
-        </pc:sldMkLst>
-      </pc:sldChg>
-      <pc:sldChg chg="modSp mod">
-        <pc:chgData name="Gerth Stølting Brodal" userId="04ef4784-6591-4f86-a140-f5c3b108582a" providerId="ADAL" clId="{E844BD47-6F0E-48E1-86F1-22B2BA2793E1}" dt="2024-05-06T11:44:39.974" v="100" actId="20577"/>
-        <pc:sldMkLst>
-          <pc:docMk/>
-          <pc:sldMk cId="2312210166" sldId="718"/>
-        </pc:sldMkLst>
+        <pc:graphicFrameChg chg="modGraphic">
+          <ac:chgData name="Gerth Stølting Brodal" userId="04ef4784-6591-4f86-a140-f5c3b108582a" providerId="ADAL" clId="{73BAC7D6-516A-44B5-B4B0-C7B08CA8B392}" dt="2026-03-18T13:06:23.324" v="3" actId="20577"/>
+          <ac:graphicFrameMkLst>
+            <pc:docMk/>
+            <pc:sldMk cId="1667845984" sldId="703"/>
+            <ac:graphicFrameMk id="5" creationId="{00000000-0000-0000-0000-000000000000}"/>
+          </ac:graphicFrameMkLst>
+        </pc:graphicFrameChg>
       </pc:sldChg>
     </pc:docChg>
   </pc:docChgLst>
@@ -527,7 +249,7 @@
           <a:p>
             <a:fld id="{FB1A172F-81D4-4DC4-9113-1DBD56EC3646}" type="datetimeFigureOut">
               <a:rPr lang="en-US" smtClean="0"/>
-              <a:t>4/26/2025</a:t>
+              <a:t>3/18/2026</a:t>
             </a:fld>
             <a:endParaRPr lang="en-US"/>
           </a:p>
@@ -3445,7 +3167,7 @@
           <a:p>
             <a:fld id="{0560A9CD-0304-4E0B-9E82-E7E0115DE05B}" type="datetimeFigureOut">
               <a:rPr lang="en-US" smtClean="0"/>
-              <a:t>4/26/2025</a:t>
+              <a:t>3/18/2026</a:t>
             </a:fld>
             <a:endParaRPr lang="en-US"/>
           </a:p>
@@ -3613,7 +3335,7 @@
           <a:p>
             <a:fld id="{0560A9CD-0304-4E0B-9E82-E7E0115DE05B}" type="datetimeFigureOut">
               <a:rPr lang="en-US" smtClean="0"/>
-              <a:t>4/26/2025</a:t>
+              <a:t>3/18/2026</a:t>
             </a:fld>
             <a:endParaRPr lang="en-US"/>
           </a:p>
@@ -3791,7 +3513,7 @@
           <a:p>
             <a:fld id="{0560A9CD-0304-4E0B-9E82-E7E0115DE05B}" type="datetimeFigureOut">
               <a:rPr lang="en-US" smtClean="0"/>
-              <a:t>4/26/2025</a:t>
+              <a:t>3/18/2026</a:t>
             </a:fld>
             <a:endParaRPr lang="en-US"/>
           </a:p>
@@ -3974,7 +3696,7 @@
           <a:p>
             <a:fld id="{0560A9CD-0304-4E0B-9E82-E7E0115DE05B}" type="datetimeFigureOut">
               <a:rPr lang="en-US" smtClean="0"/>
-              <a:t>4/26/2025</a:t>
+              <a:t>3/18/2026</a:t>
             </a:fld>
             <a:endParaRPr lang="en-US"/>
           </a:p>
@@ -4219,7 +3941,7 @@
           <a:p>
             <a:fld id="{0560A9CD-0304-4E0B-9E82-E7E0115DE05B}" type="datetimeFigureOut">
               <a:rPr lang="en-US" smtClean="0"/>
-              <a:t>4/26/2025</a:t>
+              <a:t>3/18/2026</a:t>
             </a:fld>
             <a:endParaRPr lang="en-US"/>
           </a:p>
@@ -4448,7 +4170,7 @@
           <a:p>
             <a:fld id="{0560A9CD-0304-4E0B-9E82-E7E0115DE05B}" type="datetimeFigureOut">
               <a:rPr lang="en-US" smtClean="0"/>
-              <a:t>4/26/2025</a:t>
+              <a:t>3/18/2026</a:t>
             </a:fld>
             <a:endParaRPr lang="en-US"/>
           </a:p>
@@ -4812,7 +4534,7 @@
           <a:p>
             <a:fld id="{0560A9CD-0304-4E0B-9E82-E7E0115DE05B}" type="datetimeFigureOut">
               <a:rPr lang="en-US" smtClean="0"/>
-              <a:t>4/26/2025</a:t>
+              <a:t>3/18/2026</a:t>
             </a:fld>
             <a:endParaRPr lang="en-US"/>
           </a:p>
@@ -4929,7 +4651,7 @@
           <a:p>
             <a:fld id="{0560A9CD-0304-4E0B-9E82-E7E0115DE05B}" type="datetimeFigureOut">
               <a:rPr lang="en-US" smtClean="0"/>
-              <a:t>4/26/2025</a:t>
+              <a:t>3/18/2026</a:t>
             </a:fld>
             <a:endParaRPr lang="en-US"/>
           </a:p>
@@ -5024,7 +4746,7 @@
           <a:p>
             <a:fld id="{0560A9CD-0304-4E0B-9E82-E7E0115DE05B}" type="datetimeFigureOut">
               <a:rPr lang="en-US" smtClean="0"/>
-              <a:t>4/26/2025</a:t>
+              <a:t>3/18/2026</a:t>
             </a:fld>
             <a:endParaRPr lang="en-US"/>
           </a:p>
@@ -5299,7 +5021,7 @@
           <a:p>
             <a:fld id="{0560A9CD-0304-4E0B-9E82-E7E0115DE05B}" type="datetimeFigureOut">
               <a:rPr lang="en-US" smtClean="0"/>
-              <a:t>4/26/2025</a:t>
+              <a:t>3/18/2026</a:t>
             </a:fld>
             <a:endParaRPr lang="en-US"/>
           </a:p>
@@ -5551,7 +5273,7 @@
           <a:p>
             <a:fld id="{0560A9CD-0304-4E0B-9E82-E7E0115DE05B}" type="datetimeFigureOut">
               <a:rPr lang="en-US" smtClean="0"/>
-              <a:t>4/26/2025</a:t>
+              <a:t>3/18/2026</a:t>
             </a:fld>
             <a:endParaRPr lang="en-US"/>
           </a:p>
@@ -5762,7 +5484,7 @@
           <a:p>
             <a:fld id="{0560A9CD-0304-4E0B-9E82-E7E0115DE05B}" type="datetimeFigureOut">
               <a:rPr lang="en-US" smtClean="0"/>
-              <a:t>4/26/2025</a:t>
+              <a:t>3/18/2026</a:t>
             </a:fld>
             <a:endParaRPr lang="en-US"/>
           </a:p>
@@ -13491,7 +13213,7 @@
           <p:nvPr>
             <p:extLst>
               <p:ext uri="{D42A27DB-BD31-4B8C-83A1-F6EECF244321}">
-                <p14:modId xmlns:p14="http://schemas.microsoft.com/office/powerpoint/2010/main" val="113298930"/>
+                <p14:modId xmlns:p14="http://schemas.microsoft.com/office/powerpoint/2010/main" val="580253701"/>
               </p:ext>
             </p:extLst>
           </p:nvPr>
@@ -13613,7 +13335,21 @@
                           <a:latin typeface="Courier New" panose="02070309020205020404" pitchFamily="49" charset="0"/>
                           <a:cs typeface="Courier New" panose="02070309020205020404" pitchFamily="49" charset="0"/>
                         </a:rPr>
-                        <a:t>    if y == None:</a:t>
+                        <a:t>    if </a:t>
+                      </a:r>
+                      <a:r>
+                        <a:rPr lang="en-US" sz="1600" b="1">
+                          <a:latin typeface="Courier New" panose="02070309020205020404" pitchFamily="49" charset="0"/>
+                          <a:cs typeface="Courier New" panose="02070309020205020404" pitchFamily="49" charset="0"/>
+                        </a:rPr>
+                        <a:t>y is </a:t>
+                      </a:r>
+                      <a:r>
+                        <a:rPr lang="en-US" sz="1600" b="1" dirty="0">
+                          <a:latin typeface="Courier New" panose="02070309020205020404" pitchFamily="49" charset="0"/>
+                          <a:cs typeface="Courier New" panose="02070309020205020404" pitchFamily="49" charset="0"/>
+                        </a:rPr>
+                        <a:t>None:</a:t>
                       </a:r>
                     </a:p>
                     <a:p>
